--- a/reports/土地開發提案-簡化版.pptx
+++ b/reports/土地開發提案-簡化版.pptx
@@ -4103,6 +4103,16 @@
               <a:t>18個月</a:t>
             </a:r>
           </a:p>
+          <a:p>
+            <a:r>
+              <a:rPr lang="zh-TW" sz="1200" b="1" dirty="0">
+                <a:solidFill>
+                  <a:srgbClr val="C4502A"/>
+                </a:solidFill>
+              </a:rPr>
+              <a:t>116年1月</a:t>
+            </a:r>
+          </a:p>
         </p:txBody>
       </p:sp>
       <p:sp>
@@ -4257,6 +4267,16 @@
               <a:t>12個月</a:t>
             </a:r>
           </a:p>
+          <a:p>
+            <a:r>
+              <a:rPr lang="zh-TW" sz="1200" b="1" dirty="0">
+                <a:solidFill>
+                  <a:srgbClr val="C4502A"/>
+                </a:solidFill>
+              </a:rPr>
+              <a:t>117年7月</a:t>
+            </a:r>
+          </a:p>
         </p:txBody>
       </p:sp>
       <p:sp>
@@ -4411,6 +4431,16 @@
               <a:t>6個月</a:t>
             </a:r>
           </a:p>
+          <a:p>
+            <a:r>
+              <a:rPr lang="zh-TW" sz="1200" b="1" dirty="0">
+                <a:solidFill>
+                  <a:srgbClr val="C4502A"/>
+                </a:solidFill>
+              </a:rPr>
+              <a:t>118年1月</a:t>
+            </a:r>
+          </a:p>
         </p:txBody>
       </p:sp>
       <p:sp>
@@ -4564,6 +4594,16 @@
                 </a:solidFill>
               </a:rPr>
               <a:t>24個月</a:t>
+            </a:r>
+          </a:p>
+          <a:p>
+            <a:r>
+              <a:rPr lang="zh-TW" sz="1200" b="1" dirty="0">
+                <a:solidFill>
+                  <a:srgbClr val="C4502A"/>
+                </a:solidFill>
+              </a:rPr>
+              <a:t>129年前</a:t>
             </a:r>
           </a:p>
         </p:txBody>
